--- a/Project-Presentation-Template.pptx
+++ b/Project-Presentation-Template.pptx
@@ -113,7 +113,41 @@
       </a:defRPr>
     </a:lvl9pPr>
   </p:defaultTextStyle>
+  <p:extLst>
+    <p:ext uri="{EFAFB233-063F-42B5-8137-9DF3F51BA10A}">
+      <p15:sldGuideLst xmlns:p15="http://schemas.microsoft.com/office/powerpoint/2012/main"/>
+    </p:ext>
+  </p:extLst>
 </p:presentation>
+</file>
+
+<file path=ppt/changesInfos/changesInfo1.xml><?xml version="1.0" encoding="utf-8"?>
+<pc:chgInfo xmlns:a="http://schemas.openxmlformats.org/drawingml/2006/main" xmlns:r="http://schemas.openxmlformats.org/officeDocument/2006/relationships" xmlns:ac="http://schemas.microsoft.com/office/drawing/2013/main/command" xmlns:pc="http://schemas.microsoft.com/office/powerpoint/2013/main/command">
+  <pc:docChgLst>
+    <pc:chgData name="Nguyen,Quang" userId="23891ed8-be2c-452b-90d3-fcb364b9bbff" providerId="ADAL" clId="{34BD0BAB-0731-4425-A030-A15B82932F5E}"/>
+    <pc:docChg chg="modSld">
+      <pc:chgData name="Nguyen,Quang" userId="23891ed8-be2c-452b-90d3-fcb364b9bbff" providerId="ADAL" clId="{34BD0BAB-0731-4425-A030-A15B82932F5E}" dt="2026-05-14T03:40:42.088" v="3" actId="20577"/>
+      <pc:docMkLst>
+        <pc:docMk/>
+      </pc:docMkLst>
+      <pc:sldChg chg="modSp mod">
+        <pc:chgData name="Nguyen,Quang" userId="23891ed8-be2c-452b-90d3-fcb364b9bbff" providerId="ADAL" clId="{34BD0BAB-0731-4425-A030-A15B82932F5E}" dt="2026-05-14T03:40:42.088" v="3" actId="20577"/>
+        <pc:sldMkLst>
+          <pc:docMk/>
+          <pc:sldMk cId="831070309" sldId="256"/>
+        </pc:sldMkLst>
+        <pc:spChg chg="mod">
+          <ac:chgData name="Nguyen,Quang" userId="23891ed8-be2c-452b-90d3-fcb364b9bbff" providerId="ADAL" clId="{34BD0BAB-0731-4425-A030-A15B82932F5E}" dt="2026-05-14T03:40:42.088" v="3" actId="20577"/>
+          <ac:spMkLst>
+            <pc:docMk/>
+            <pc:sldMk cId="831070309" sldId="256"/>
+            <ac:spMk id="2" creationId="{D709020E-F455-E944-BBDA-1052D6751E5E}"/>
+          </ac:spMkLst>
+        </pc:spChg>
+      </pc:sldChg>
+    </pc:docChg>
+  </pc:docChgLst>
+</pc:chgInfo>
 </file>
 
 <file path=ppt/slideLayouts/slideLayout1.xml><?xml version="1.0" encoding="utf-8"?>
@@ -263,7 +297,7 @@
           <a:p>
             <a:fld id="{3C5E3940-567D-0E4A-B27A-538E5CA3F251}" type="datetimeFigureOut">
               <a:rPr lang="en-US" smtClean="0"/>
-              <a:t>11/27/20</a:t>
+              <a:t>05/13/2026</a:t>
             </a:fld>
             <a:endParaRPr lang="en-US"/>
           </a:p>
@@ -461,7 +495,7 @@
           <a:p>
             <a:fld id="{3C5E3940-567D-0E4A-B27A-538E5CA3F251}" type="datetimeFigureOut">
               <a:rPr lang="en-US" smtClean="0"/>
-              <a:t>11/27/20</a:t>
+              <a:t>05/13/2026</a:t>
             </a:fld>
             <a:endParaRPr lang="en-US"/>
           </a:p>
@@ -669,7 +703,7 @@
           <a:p>
             <a:fld id="{3C5E3940-567D-0E4A-B27A-538E5CA3F251}" type="datetimeFigureOut">
               <a:rPr lang="en-US" smtClean="0"/>
-              <a:t>11/27/20</a:t>
+              <a:t>05/13/2026</a:t>
             </a:fld>
             <a:endParaRPr lang="en-US"/>
           </a:p>
@@ -867,7 +901,7 @@
           <a:p>
             <a:fld id="{3C5E3940-567D-0E4A-B27A-538E5CA3F251}" type="datetimeFigureOut">
               <a:rPr lang="en-US" smtClean="0"/>
-              <a:t>11/27/20</a:t>
+              <a:t>05/13/2026</a:t>
             </a:fld>
             <a:endParaRPr lang="en-US"/>
           </a:p>
@@ -1142,7 +1176,7 @@
           <a:p>
             <a:fld id="{3C5E3940-567D-0E4A-B27A-538E5CA3F251}" type="datetimeFigureOut">
               <a:rPr lang="en-US" smtClean="0"/>
-              <a:t>11/27/20</a:t>
+              <a:t>05/13/2026</a:t>
             </a:fld>
             <a:endParaRPr lang="en-US"/>
           </a:p>
@@ -1407,7 +1441,7 @@
           <a:p>
             <a:fld id="{3C5E3940-567D-0E4A-B27A-538E5CA3F251}" type="datetimeFigureOut">
               <a:rPr lang="en-US" smtClean="0"/>
-              <a:t>11/27/20</a:t>
+              <a:t>05/13/2026</a:t>
             </a:fld>
             <a:endParaRPr lang="en-US"/>
           </a:p>
@@ -1819,7 +1853,7 @@
           <a:p>
             <a:fld id="{3C5E3940-567D-0E4A-B27A-538E5CA3F251}" type="datetimeFigureOut">
               <a:rPr lang="en-US" smtClean="0"/>
-              <a:t>11/27/20</a:t>
+              <a:t>05/13/2026</a:t>
             </a:fld>
             <a:endParaRPr lang="en-US"/>
           </a:p>
@@ -1960,7 +1994,7 @@
           <a:p>
             <a:fld id="{3C5E3940-567D-0E4A-B27A-538E5CA3F251}" type="datetimeFigureOut">
               <a:rPr lang="en-US" smtClean="0"/>
-              <a:t>11/27/20</a:t>
+              <a:t>05/13/2026</a:t>
             </a:fld>
             <a:endParaRPr lang="en-US"/>
           </a:p>
@@ -2073,7 +2107,7 @@
           <a:p>
             <a:fld id="{3C5E3940-567D-0E4A-B27A-538E5CA3F251}" type="datetimeFigureOut">
               <a:rPr lang="en-US" smtClean="0"/>
-              <a:t>11/27/20</a:t>
+              <a:t>05/13/2026</a:t>
             </a:fld>
             <a:endParaRPr lang="en-US"/>
           </a:p>
@@ -2384,7 +2418,7 @@
           <a:p>
             <a:fld id="{3C5E3940-567D-0E4A-B27A-538E5CA3F251}" type="datetimeFigureOut">
               <a:rPr lang="en-US" smtClean="0"/>
-              <a:t>11/27/20</a:t>
+              <a:t>05/13/2026</a:t>
             </a:fld>
             <a:endParaRPr lang="en-US"/>
           </a:p>
@@ -2672,7 +2706,7 @@
           <a:p>
             <a:fld id="{3C5E3940-567D-0E4A-B27A-538E5CA3F251}" type="datetimeFigureOut">
               <a:rPr lang="en-US" smtClean="0"/>
-              <a:t>11/27/20</a:t>
+              <a:t>05/13/2026</a:t>
             </a:fld>
             <a:endParaRPr lang="en-US"/>
           </a:p>
@@ -2913,7 +2947,7 @@
           <a:p>
             <a:fld id="{3C5E3940-567D-0E4A-B27A-538E5CA3F251}" type="datetimeFigureOut">
               <a:rPr lang="en-US" smtClean="0"/>
-              <a:t>11/27/20</a:t>
+              <a:t>05/13/2026</a:t>
             </a:fld>
             <a:endParaRPr lang="en-US"/>
           </a:p>
@@ -3352,9 +3386,10 @@
           <a:lstStyle/>
           <a:p>
             <a:r>
-              <a:rPr lang="en-US" dirty="0"/>
-              <a:t>Project Title</a:t>
-            </a:r>
+              <a:rPr lang="en-US"/>
+              <a:t>Test</a:t>
+            </a:r>
+            <a:endParaRPr lang="en-US" dirty="0"/>
           </a:p>
         </p:txBody>
       </p:sp>

--- a/Project-Presentation-Template.pptx
+++ b/Project-Presentation-Template.pptx
@@ -121,8 +121,93 @@
 </p:presentation>
 </file>
 
+<file path=ppt/revisionInfo.xml><?xml version="1.0" encoding="utf-8"?>
+<p1510:revInfo xmlns:a="http://schemas.openxmlformats.org/drawingml/2006/main" xmlns:r="http://schemas.openxmlformats.org/officeDocument/2006/relationships" xmlns:p1510="http://schemas.microsoft.com/office/powerpoint/2015/10/main">
+  <p1510:revLst>
+    <p1510:client id="{AAD7B380-1ACD-4215-A8EF-7F81B337F35B}" v="2" dt="2026-05-28T00:17:20.845"/>
+  </p1510:revLst>
+</p1510:revInfo>
+</file>
+
 <file path=ppt/changesInfos/changesInfo1.xml><?xml version="1.0" encoding="utf-8"?>
 <pc:chgInfo xmlns:a="http://schemas.openxmlformats.org/drawingml/2006/main" xmlns:r="http://schemas.openxmlformats.org/officeDocument/2006/relationships" xmlns:ac="http://schemas.microsoft.com/office/drawing/2013/main/command" xmlns:pc="http://schemas.microsoft.com/office/powerpoint/2013/main/command">
+  <pc:docChgLst>
+    <pc:chgData name="Jewel Cooper" userId="9990a5e7a740e4be" providerId="LiveId" clId="{3461AC69-CAA4-4315-B298-9D3477C8BDF2}"/>
+    <pc:docChg chg="custSel modSld">
+      <pc:chgData name="Jewel Cooper" userId="9990a5e7a740e4be" providerId="LiveId" clId="{3461AC69-CAA4-4315-B298-9D3477C8BDF2}" dt="2026-05-28T00:41:20.598" v="1173" actId="20577"/>
+      <pc:docMkLst>
+        <pc:docMk/>
+      </pc:docMkLst>
+      <pc:sldChg chg="modSp mod">
+        <pc:chgData name="Jewel Cooper" userId="9990a5e7a740e4be" providerId="LiveId" clId="{3461AC69-CAA4-4315-B298-9D3477C8BDF2}" dt="2026-05-27T23:22:57.619" v="97" actId="1076"/>
+        <pc:sldMkLst>
+          <pc:docMk/>
+          <pc:sldMk cId="831070309" sldId="256"/>
+        </pc:sldMkLst>
+        <pc:spChg chg="mod">
+          <ac:chgData name="Jewel Cooper" userId="9990a5e7a740e4be" providerId="LiveId" clId="{3461AC69-CAA4-4315-B298-9D3477C8BDF2}" dt="2026-05-27T23:22:53.337" v="96" actId="1076"/>
+          <ac:spMkLst>
+            <pc:docMk/>
+            <pc:sldMk cId="831070309" sldId="256"/>
+            <ac:spMk id="2" creationId="{D709020E-F455-E944-BBDA-1052D6751E5E}"/>
+          </ac:spMkLst>
+        </pc:spChg>
+        <pc:spChg chg="mod">
+          <ac:chgData name="Jewel Cooper" userId="9990a5e7a740e4be" providerId="LiveId" clId="{3461AC69-CAA4-4315-B298-9D3477C8BDF2}" dt="2026-05-27T23:22:57.619" v="97" actId="1076"/>
+          <ac:spMkLst>
+            <pc:docMk/>
+            <pc:sldMk cId="831070309" sldId="256"/>
+            <ac:spMk id="3" creationId="{86318183-B2C7-364B-BD06-B3B9F040F805}"/>
+          </ac:spMkLst>
+        </pc:spChg>
+      </pc:sldChg>
+      <pc:sldChg chg="modSp mod">
+        <pc:chgData name="Jewel Cooper" userId="9990a5e7a740e4be" providerId="LiveId" clId="{3461AC69-CAA4-4315-B298-9D3477C8BDF2}" dt="2026-05-28T00:22:48.207" v="679" actId="20577"/>
+        <pc:sldMkLst>
+          <pc:docMk/>
+          <pc:sldMk cId="2397346906" sldId="257"/>
+        </pc:sldMkLst>
+        <pc:spChg chg="mod">
+          <ac:chgData name="Jewel Cooper" userId="9990a5e7a740e4be" providerId="LiveId" clId="{3461AC69-CAA4-4315-B298-9D3477C8BDF2}" dt="2026-05-28T00:22:48.207" v="679" actId="20577"/>
+          <ac:spMkLst>
+            <pc:docMk/>
+            <pc:sldMk cId="2397346906" sldId="257"/>
+            <ac:spMk id="3" creationId="{3A721E59-1DC4-3845-9DB3-10F69E64143F}"/>
+          </ac:spMkLst>
+        </pc:spChg>
+      </pc:sldChg>
+      <pc:sldChg chg="modSp">
+        <pc:chgData name="Jewel Cooper" userId="9990a5e7a740e4be" providerId="LiveId" clId="{3461AC69-CAA4-4315-B298-9D3477C8BDF2}" dt="2026-05-28T00:17:20.845" v="616"/>
+        <pc:sldMkLst>
+          <pc:docMk/>
+          <pc:sldMk cId="3298431866" sldId="258"/>
+        </pc:sldMkLst>
+        <pc:spChg chg="mod">
+          <ac:chgData name="Jewel Cooper" userId="9990a5e7a740e4be" providerId="LiveId" clId="{3461AC69-CAA4-4315-B298-9D3477C8BDF2}" dt="2026-05-28T00:17:20.845" v="616"/>
+          <ac:spMkLst>
+            <pc:docMk/>
+            <pc:sldMk cId="3298431866" sldId="258"/>
+            <ac:spMk id="3" creationId="{69AB92F3-2775-4B46-A098-FE988824A88C}"/>
+          </ac:spMkLst>
+        </pc:spChg>
+      </pc:sldChg>
+      <pc:sldChg chg="modSp mod">
+        <pc:chgData name="Jewel Cooper" userId="9990a5e7a740e4be" providerId="LiveId" clId="{3461AC69-CAA4-4315-B298-9D3477C8BDF2}" dt="2026-05-28T00:41:20.598" v="1173" actId="20577"/>
+        <pc:sldMkLst>
+          <pc:docMk/>
+          <pc:sldMk cId="1054884919" sldId="259"/>
+        </pc:sldMkLst>
+        <pc:spChg chg="mod">
+          <ac:chgData name="Jewel Cooper" userId="9990a5e7a740e4be" providerId="LiveId" clId="{3461AC69-CAA4-4315-B298-9D3477C8BDF2}" dt="2026-05-28T00:41:20.598" v="1173" actId="20577"/>
+          <ac:spMkLst>
+            <pc:docMk/>
+            <pc:sldMk cId="1054884919" sldId="259"/>
+            <ac:spMk id="3" creationId="{ABE874BC-25A7-444E-AAB7-2E4A426FEBDC}"/>
+          </ac:spMkLst>
+        </pc:spChg>
+      </pc:sldChg>
+    </pc:docChg>
+  </pc:docChgLst>
   <pc:docChgLst>
     <pc:chgData name="Nguyen,Quang" userId="23891ed8-be2c-452b-90d3-fcb364b9bbff" providerId="ADAL" clId="{34BD0BAB-0731-4425-A030-A15B82932F5E}"/>
     <pc:docChg chg="modSld">
@@ -297,7 +382,7 @@
           <a:p>
             <a:fld id="{3C5E3940-567D-0E4A-B27A-538E5CA3F251}" type="datetimeFigureOut">
               <a:rPr lang="en-US" smtClean="0"/>
-              <a:t>05/13/2026</a:t>
+              <a:t>5/27/2026</a:t>
             </a:fld>
             <a:endParaRPr lang="en-US"/>
           </a:p>
@@ -495,7 +580,7 @@
           <a:p>
             <a:fld id="{3C5E3940-567D-0E4A-B27A-538E5CA3F251}" type="datetimeFigureOut">
               <a:rPr lang="en-US" smtClean="0"/>
-              <a:t>05/13/2026</a:t>
+              <a:t>5/27/2026</a:t>
             </a:fld>
             <a:endParaRPr lang="en-US"/>
           </a:p>
@@ -703,7 +788,7 @@
           <a:p>
             <a:fld id="{3C5E3940-567D-0E4A-B27A-538E5CA3F251}" type="datetimeFigureOut">
               <a:rPr lang="en-US" smtClean="0"/>
-              <a:t>05/13/2026</a:t>
+              <a:t>5/27/2026</a:t>
             </a:fld>
             <a:endParaRPr lang="en-US"/>
           </a:p>
@@ -901,7 +986,7 @@
           <a:p>
             <a:fld id="{3C5E3940-567D-0E4A-B27A-538E5CA3F251}" type="datetimeFigureOut">
               <a:rPr lang="en-US" smtClean="0"/>
-              <a:t>05/13/2026</a:t>
+              <a:t>5/27/2026</a:t>
             </a:fld>
             <a:endParaRPr lang="en-US"/>
           </a:p>
@@ -1176,7 +1261,7 @@
           <a:p>
             <a:fld id="{3C5E3940-567D-0E4A-B27A-538E5CA3F251}" type="datetimeFigureOut">
               <a:rPr lang="en-US" smtClean="0"/>
-              <a:t>05/13/2026</a:t>
+              <a:t>5/27/2026</a:t>
             </a:fld>
             <a:endParaRPr lang="en-US"/>
           </a:p>
@@ -1441,7 +1526,7 @@
           <a:p>
             <a:fld id="{3C5E3940-567D-0E4A-B27A-538E5CA3F251}" type="datetimeFigureOut">
               <a:rPr lang="en-US" smtClean="0"/>
-              <a:t>05/13/2026</a:t>
+              <a:t>5/27/2026</a:t>
             </a:fld>
             <a:endParaRPr lang="en-US"/>
           </a:p>
@@ -1853,7 +1938,7 @@
           <a:p>
             <a:fld id="{3C5E3940-567D-0E4A-B27A-538E5CA3F251}" type="datetimeFigureOut">
               <a:rPr lang="en-US" smtClean="0"/>
-              <a:t>05/13/2026</a:t>
+              <a:t>5/27/2026</a:t>
             </a:fld>
             <a:endParaRPr lang="en-US"/>
           </a:p>
@@ -1994,7 +2079,7 @@
           <a:p>
             <a:fld id="{3C5E3940-567D-0E4A-B27A-538E5CA3F251}" type="datetimeFigureOut">
               <a:rPr lang="en-US" smtClean="0"/>
-              <a:t>05/13/2026</a:t>
+              <a:t>5/27/2026</a:t>
             </a:fld>
             <a:endParaRPr lang="en-US"/>
           </a:p>
@@ -2107,7 +2192,7 @@
           <a:p>
             <a:fld id="{3C5E3940-567D-0E4A-B27A-538E5CA3F251}" type="datetimeFigureOut">
               <a:rPr lang="en-US" smtClean="0"/>
-              <a:t>05/13/2026</a:t>
+              <a:t>5/27/2026</a:t>
             </a:fld>
             <a:endParaRPr lang="en-US"/>
           </a:p>
@@ -2418,7 +2503,7 @@
           <a:p>
             <a:fld id="{3C5E3940-567D-0E4A-B27A-538E5CA3F251}" type="datetimeFigureOut">
               <a:rPr lang="en-US" smtClean="0"/>
-              <a:t>05/13/2026</a:t>
+              <a:t>5/27/2026</a:t>
             </a:fld>
             <a:endParaRPr lang="en-US"/>
           </a:p>
@@ -2706,7 +2791,7 @@
           <a:p>
             <a:fld id="{3C5E3940-567D-0E4A-B27A-538E5CA3F251}" type="datetimeFigureOut">
               <a:rPr lang="en-US" smtClean="0"/>
-              <a:t>05/13/2026</a:t>
+              <a:t>5/27/2026</a:t>
             </a:fld>
             <a:endParaRPr lang="en-US"/>
           </a:p>
@@ -2947,7 +3032,7 @@
           <a:p>
             <a:fld id="{3C5E3940-567D-0E4A-B27A-538E5CA3F251}" type="datetimeFigureOut">
               <a:rPr lang="en-US" smtClean="0"/>
-              <a:t>05/13/2026</a:t>
+              <a:t>5/27/2026</a:t>
             </a:fld>
             <a:endParaRPr lang="en-US"/>
           </a:p>
@@ -3380,15 +3465,25 @@
             <p:ph type="ctrTitle"/>
           </p:nvPr>
         </p:nvSpPr>
-        <p:spPr/>
-        <p:txBody>
-          <a:bodyPr/>
-          <a:lstStyle/>
-          <a:p>
-            <a:r>
-              <a:rPr lang="en-US"/>
-              <a:t>Test</a:t>
-            </a:r>
+        <p:spPr>
+          <a:xfrm>
+            <a:off x="1337188" y="1820453"/>
+            <a:ext cx="9144000" cy="2387600"/>
+          </a:xfrm>
+        </p:spPr>
+        <p:txBody>
+          <a:bodyPr>
+            <a:normAutofit fontScale="90000"/>
+          </a:bodyPr>
+          <a:lstStyle/>
+          <a:p>
+            <a:r>
+              <a:rPr lang="en-US" b="1" dirty="0"/>
+              <a:t>Which car performance and race strategy factors best predict a driver's finishing position?</a:t>
+            </a:r>
+            <a:br>
+              <a:rPr lang="en-US" dirty="0"/>
+            </a:br>
             <a:endParaRPr lang="en-US" dirty="0"/>
           </a:p>
         </p:txBody>
@@ -3409,14 +3504,19 @@
             <p:ph type="subTitle" idx="1"/>
           </p:nvPr>
         </p:nvSpPr>
-        <p:spPr/>
-        <p:txBody>
-          <a:bodyPr/>
-          <a:lstStyle/>
-          <a:p>
-            <a:r>
-              <a:rPr lang="en-US" dirty="0"/>
-              <a:t>List of team members</a:t>
+        <p:spPr>
+          <a:xfrm>
+            <a:off x="1818968" y="4524298"/>
+            <a:ext cx="7796980" cy="952270"/>
+          </a:xfrm>
+        </p:spPr>
+        <p:txBody>
+          <a:bodyPr/>
+          <a:lstStyle/>
+          <a:p>
+            <a:r>
+              <a:rPr lang="en-US" b="1" dirty="0"/>
+              <a:t>Minh Vo, Jewel Cooper, &amp; Quang Nguyen</a:t>
             </a:r>
           </a:p>
         </p:txBody>
@@ -3586,7 +3686,7 @@
           <a:bodyPr/>
           <a:lstStyle/>
           <a:p>
-            <a:endParaRPr lang="en-US"/>
+            <a:endParaRPr lang="en-US" b="1" dirty="0"/>
           </a:p>
         </p:txBody>
       </p:sp>
@@ -3664,12 +3764,49 @@
             <p:ph idx="1"/>
           </p:nvPr>
         </p:nvSpPr>
-        <p:spPr/>
-        <p:txBody>
-          <a:bodyPr/>
-          <a:lstStyle/>
-          <a:p>
-            <a:endParaRPr lang="en-US"/>
+        <p:spPr>
+          <a:xfrm>
+            <a:off x="838200" y="1411968"/>
+            <a:ext cx="10515600" cy="4351338"/>
+          </a:xfrm>
+        </p:spPr>
+        <p:txBody>
+          <a:bodyPr/>
+          <a:lstStyle/>
+          <a:p>
+            <a:pPr marL="0" indent="0">
+              <a:buNone/>
+            </a:pPr>
+            <a:endParaRPr lang="en-US" dirty="0"/>
+          </a:p>
+          <a:p>
+            <a:r>
+              <a:rPr lang="en-US" dirty="0"/>
+              <a:t> Sports Broadcasters developing predictive models for future race performance outcomes</a:t>
+            </a:r>
+          </a:p>
+          <a:p>
+            <a:r>
+              <a:rPr lang="en-US" dirty="0"/>
+              <a:t>F1 pit crew for race strategy at pit stops and tire management</a:t>
+            </a:r>
+          </a:p>
+          <a:p>
+            <a:r>
+              <a:rPr lang="en-US" dirty="0"/>
+              <a:t>Sports analytics researchers for performance optimization </a:t>
+            </a:r>
+          </a:p>
+          <a:p>
+            <a:r>
+              <a:rPr lang="en-US" dirty="0"/>
+              <a:t>App developers creating </a:t>
+            </a:r>
+            <a:r>
+              <a:rPr lang="en-US"/>
+              <a:t>fan engagement tools</a:t>
+            </a:r>
+            <a:endParaRPr lang="en-US" dirty="0"/>
           </a:p>
         </p:txBody>
       </p:sp>
@@ -3751,6 +3888,34 @@
         <p:txBody>
           <a:bodyPr/>
           <a:lstStyle/>
+          <a:p>
+            <a:r>
+              <a:rPr lang="en-US" dirty="0"/>
+              <a:t>Combined data from various sources to create a unified data set:</a:t>
+            </a:r>
+          </a:p>
+          <a:p>
+            <a:pPr lvl="1"/>
+            <a:r>
+              <a:rPr lang="en-US" dirty="0"/>
+              <a:t>Telemetry and performance data from 2023 Formula 1’s </a:t>
+            </a:r>
+            <a:r>
+              <a:rPr lang="en-US" b="1" dirty="0"/>
+              <a:t>OpenF1 API</a:t>
+            </a:r>
+          </a:p>
+          <a:p>
+            <a:pPr lvl="1"/>
+            <a:r>
+              <a:rPr lang="en-US" dirty="0"/>
+              <a:t>Historical race results from </a:t>
+            </a:r>
+            <a:r>
+              <a:rPr lang="en-US" b="1" dirty="0"/>
+              <a:t>StatsF1</a:t>
+            </a:r>
+          </a:p>
           <a:p>
             <a:endParaRPr lang="en-US" dirty="0"/>
           </a:p>
